--- a/Assets/ThirdParty/CleanFlatIcon/UsingGroup/icon.pptx
+++ b/Assets/ThirdParty/CleanFlatIcon/UsingGroup/icon.pptx
@@ -2773,214 +2773,227 @@
           <a:chExt cx="0" cy="0"/>
         </a:xfrm>
       </p:grpSpPr>
-      <p:sp>
-        <p:nvSpPr>
-          <p:cNvPr id="166" name="직사각형 165">
+      <p:grpSp>
+        <p:nvGrpSpPr>
+          <p:cNvPr id="144" name="그룹 143">
             <a:extLst>
               <a:ext uri="{FF2B5EF4-FFF2-40B4-BE49-F238E27FC236}">
-                <a16:creationId xmlns:a16="http://schemas.microsoft.com/office/drawing/2014/main" id="{0A388C1B-F26A-FC79-AA0E-10DCA470A95C}"/>
+                <a16:creationId xmlns:a16="http://schemas.microsoft.com/office/drawing/2014/main" id="{1C8685C6-5D89-FA51-BF74-8D28ED13E330}"/>
               </a:ext>
             </a:extLst>
           </p:cNvPr>
-          <p:cNvSpPr/>
+          <p:cNvGrpSpPr/>
           <p:nvPr/>
-        </p:nvSpPr>
-        <p:spPr>
+        </p:nvGrpSpPr>
+        <p:grpSpPr>
           <a:xfrm>
             <a:off x="0" y="0"/>
-            <a:ext cx="1620000" cy="1620000"/>
+            <a:ext cx="3240000" cy="3240000"/>
+            <a:chOff x="0" y="0"/>
+            <a:chExt cx="3240000" cy="3240000"/>
           </a:xfrm>
-          <a:prstGeom prst="rect">
-            <a:avLst/>
-          </a:prstGeom>
-          <a:noFill/>
-          <a:ln w="12700">
-            <a:solidFill>
-              <a:schemeClr val="bg1"/>
-            </a:solidFill>
-          </a:ln>
-        </p:spPr>
-        <p:style>
-          <a:lnRef idx="2">
-            <a:schemeClr val="accent1">
-              <a:shade val="15000"/>
-            </a:schemeClr>
-          </a:lnRef>
-          <a:fillRef idx="1">
-            <a:schemeClr val="accent1"/>
-          </a:fillRef>
-          <a:effectRef idx="0">
-            <a:schemeClr val="accent1"/>
-          </a:effectRef>
-          <a:fontRef idx="minor">
-            <a:schemeClr val="lt1"/>
-          </a:fontRef>
-        </p:style>
-        <p:txBody>
-          <a:bodyPr rtlCol="0" anchor="ctr"/>
-          <a:lstStyle/>
-          <a:p>
-            <a:pPr algn="ctr"/>
-            <a:endParaRPr lang="ko-KR" altLang="en-US"/>
-          </a:p>
-        </p:txBody>
-      </p:sp>
-      <p:sp>
-        <p:nvSpPr>
-          <p:cNvPr id="17" name="직사각형 16">
-            <a:extLst>
-              <a:ext uri="{FF2B5EF4-FFF2-40B4-BE49-F238E27FC236}">
-                <a16:creationId xmlns:a16="http://schemas.microsoft.com/office/drawing/2014/main" id="{21ED9FF9-3F04-8E3E-232C-F12CCC3E8C96}"/>
-              </a:ext>
-            </a:extLst>
-          </p:cNvPr>
-          <p:cNvSpPr/>
-          <p:nvPr/>
-        </p:nvSpPr>
-        <p:spPr>
-          <a:xfrm>
-            <a:off x="1620000" y="0"/>
-            <a:ext cx="1620000" cy="1620000"/>
-          </a:xfrm>
-          <a:prstGeom prst="rect">
-            <a:avLst/>
-          </a:prstGeom>
-          <a:noFill/>
-          <a:ln w="12700">
-            <a:solidFill>
-              <a:schemeClr val="bg1"/>
-            </a:solidFill>
-          </a:ln>
-        </p:spPr>
-        <p:style>
-          <a:lnRef idx="2">
-            <a:schemeClr val="accent1">
-              <a:shade val="15000"/>
-            </a:schemeClr>
-          </a:lnRef>
-          <a:fillRef idx="1">
-            <a:schemeClr val="accent1"/>
-          </a:fillRef>
-          <a:effectRef idx="0">
-            <a:schemeClr val="accent1"/>
-          </a:effectRef>
-          <a:fontRef idx="minor">
-            <a:schemeClr val="lt1"/>
-          </a:fontRef>
-        </p:style>
-        <p:txBody>
-          <a:bodyPr rtlCol="0" anchor="ctr"/>
-          <a:lstStyle/>
-          <a:p>
-            <a:pPr algn="ctr"/>
-            <a:endParaRPr lang="ko-KR" altLang="en-US"/>
-          </a:p>
-        </p:txBody>
-      </p:sp>
-      <p:sp>
-        <p:nvSpPr>
-          <p:cNvPr id="20" name="직사각형 19">
-            <a:extLst>
-              <a:ext uri="{FF2B5EF4-FFF2-40B4-BE49-F238E27FC236}">
-                <a16:creationId xmlns:a16="http://schemas.microsoft.com/office/drawing/2014/main" id="{742AA8B5-EFBF-E680-AB67-861B4F78C07E}"/>
-              </a:ext>
-            </a:extLst>
-          </p:cNvPr>
-          <p:cNvSpPr/>
-          <p:nvPr/>
-        </p:nvSpPr>
-        <p:spPr>
-          <a:xfrm>
-            <a:off x="0" y="1620000"/>
-            <a:ext cx="1620000" cy="1620000"/>
-          </a:xfrm>
-          <a:prstGeom prst="rect">
-            <a:avLst/>
-          </a:prstGeom>
-          <a:noFill/>
-          <a:ln w="12700">
-            <a:solidFill>
-              <a:schemeClr val="bg1"/>
-            </a:solidFill>
-          </a:ln>
-        </p:spPr>
-        <p:style>
-          <a:lnRef idx="2">
-            <a:schemeClr val="accent1">
-              <a:shade val="15000"/>
-            </a:schemeClr>
-          </a:lnRef>
-          <a:fillRef idx="1">
-            <a:schemeClr val="accent1"/>
-          </a:fillRef>
-          <a:effectRef idx="0">
-            <a:schemeClr val="accent1"/>
-          </a:effectRef>
-          <a:fontRef idx="minor">
-            <a:schemeClr val="lt1"/>
-          </a:fontRef>
-        </p:style>
-        <p:txBody>
-          <a:bodyPr rtlCol="0" anchor="ctr"/>
-          <a:lstStyle/>
-          <a:p>
-            <a:pPr algn="ctr"/>
-            <a:endParaRPr lang="ko-KR" altLang="en-US"/>
-          </a:p>
-        </p:txBody>
-      </p:sp>
-      <p:sp>
-        <p:nvSpPr>
-          <p:cNvPr id="23" name="직사각형 22">
-            <a:extLst>
-              <a:ext uri="{FF2B5EF4-FFF2-40B4-BE49-F238E27FC236}">
-                <a16:creationId xmlns:a16="http://schemas.microsoft.com/office/drawing/2014/main" id="{C43CC0A2-7D6B-E611-9239-7023E480C6D7}"/>
-              </a:ext>
-            </a:extLst>
-          </p:cNvPr>
-          <p:cNvSpPr/>
-          <p:nvPr/>
-        </p:nvSpPr>
-        <p:spPr>
-          <a:xfrm>
-            <a:off x="1620000" y="1620000"/>
-            <a:ext cx="1620000" cy="1620000"/>
-          </a:xfrm>
-          <a:prstGeom prst="rect">
-            <a:avLst/>
-          </a:prstGeom>
-          <a:noFill/>
-          <a:ln w="12700">
-            <a:solidFill>
-              <a:schemeClr val="bg1"/>
-            </a:solidFill>
-          </a:ln>
-        </p:spPr>
-        <p:style>
-          <a:lnRef idx="2">
-            <a:schemeClr val="accent1">
-              <a:shade val="15000"/>
-            </a:schemeClr>
-          </a:lnRef>
-          <a:fillRef idx="1">
-            <a:schemeClr val="accent1"/>
-          </a:fillRef>
-          <a:effectRef idx="0">
-            <a:schemeClr val="accent1"/>
-          </a:effectRef>
-          <a:fontRef idx="minor">
-            <a:schemeClr val="lt1"/>
-          </a:fontRef>
-        </p:style>
-        <p:txBody>
-          <a:bodyPr rtlCol="0" anchor="ctr"/>
-          <a:lstStyle/>
-          <a:p>
-            <a:pPr algn="ctr"/>
-            <a:endParaRPr lang="ko-KR" altLang="en-US"/>
-          </a:p>
-        </p:txBody>
-      </p:sp>
+        </p:grpSpPr>
+        <p:sp>
+          <p:nvSpPr>
+            <p:cNvPr id="166" name="직사각형 165">
+              <a:extLst>
+                <a:ext uri="{FF2B5EF4-FFF2-40B4-BE49-F238E27FC236}">
+                  <a16:creationId xmlns:a16="http://schemas.microsoft.com/office/drawing/2014/main" id="{0A388C1B-F26A-FC79-AA0E-10DCA470A95C}"/>
+                </a:ext>
+              </a:extLst>
+            </p:cNvPr>
+            <p:cNvSpPr/>
+            <p:nvPr/>
+          </p:nvSpPr>
+          <p:spPr>
+            <a:xfrm>
+              <a:off x="0" y="0"/>
+              <a:ext cx="1620000" cy="1620000"/>
+            </a:xfrm>
+            <a:prstGeom prst="rect">
+              <a:avLst/>
+            </a:prstGeom>
+            <a:noFill/>
+            <a:ln w="12700">
+              <a:noFill/>
+            </a:ln>
+          </p:spPr>
+          <p:style>
+            <a:lnRef idx="2">
+              <a:schemeClr val="accent1">
+                <a:shade val="15000"/>
+              </a:schemeClr>
+            </a:lnRef>
+            <a:fillRef idx="1">
+              <a:schemeClr val="accent1"/>
+            </a:fillRef>
+            <a:effectRef idx="0">
+              <a:schemeClr val="accent1"/>
+            </a:effectRef>
+            <a:fontRef idx="minor">
+              <a:schemeClr val="lt1"/>
+            </a:fontRef>
+          </p:style>
+          <p:txBody>
+            <a:bodyPr rtlCol="0" anchor="ctr"/>
+            <a:lstStyle/>
+            <a:p>
+              <a:pPr algn="ctr"/>
+              <a:endParaRPr lang="ko-KR" altLang="en-US"/>
+            </a:p>
+          </p:txBody>
+        </p:sp>
+        <p:sp>
+          <p:nvSpPr>
+            <p:cNvPr id="17" name="직사각형 16">
+              <a:extLst>
+                <a:ext uri="{FF2B5EF4-FFF2-40B4-BE49-F238E27FC236}">
+                  <a16:creationId xmlns:a16="http://schemas.microsoft.com/office/drawing/2014/main" id="{21ED9FF9-3F04-8E3E-232C-F12CCC3E8C96}"/>
+                </a:ext>
+              </a:extLst>
+            </p:cNvPr>
+            <p:cNvSpPr/>
+            <p:nvPr/>
+          </p:nvSpPr>
+          <p:spPr>
+            <a:xfrm>
+              <a:off x="1620000" y="0"/>
+              <a:ext cx="1620000" cy="1620000"/>
+            </a:xfrm>
+            <a:prstGeom prst="rect">
+              <a:avLst/>
+            </a:prstGeom>
+            <a:noFill/>
+            <a:ln w="12700">
+              <a:noFill/>
+            </a:ln>
+          </p:spPr>
+          <p:style>
+            <a:lnRef idx="2">
+              <a:schemeClr val="accent1">
+                <a:shade val="15000"/>
+              </a:schemeClr>
+            </a:lnRef>
+            <a:fillRef idx="1">
+              <a:schemeClr val="accent1"/>
+            </a:fillRef>
+            <a:effectRef idx="0">
+              <a:schemeClr val="accent1"/>
+            </a:effectRef>
+            <a:fontRef idx="minor">
+              <a:schemeClr val="lt1"/>
+            </a:fontRef>
+          </p:style>
+          <p:txBody>
+            <a:bodyPr rtlCol="0" anchor="ctr"/>
+            <a:lstStyle/>
+            <a:p>
+              <a:pPr algn="ctr"/>
+              <a:endParaRPr lang="ko-KR" altLang="en-US"/>
+            </a:p>
+          </p:txBody>
+        </p:sp>
+        <p:sp>
+          <p:nvSpPr>
+            <p:cNvPr id="20" name="직사각형 19">
+              <a:extLst>
+                <a:ext uri="{FF2B5EF4-FFF2-40B4-BE49-F238E27FC236}">
+                  <a16:creationId xmlns:a16="http://schemas.microsoft.com/office/drawing/2014/main" id="{742AA8B5-EFBF-E680-AB67-861B4F78C07E}"/>
+                </a:ext>
+              </a:extLst>
+            </p:cNvPr>
+            <p:cNvSpPr/>
+            <p:nvPr/>
+          </p:nvSpPr>
+          <p:spPr>
+            <a:xfrm>
+              <a:off x="0" y="1620000"/>
+              <a:ext cx="1620000" cy="1620000"/>
+            </a:xfrm>
+            <a:prstGeom prst="rect">
+              <a:avLst/>
+            </a:prstGeom>
+            <a:noFill/>
+            <a:ln w="12700">
+              <a:noFill/>
+            </a:ln>
+          </p:spPr>
+          <p:style>
+            <a:lnRef idx="2">
+              <a:schemeClr val="accent1">
+                <a:shade val="15000"/>
+              </a:schemeClr>
+            </a:lnRef>
+            <a:fillRef idx="1">
+              <a:schemeClr val="accent1"/>
+            </a:fillRef>
+            <a:effectRef idx="0">
+              <a:schemeClr val="accent1"/>
+            </a:effectRef>
+            <a:fontRef idx="minor">
+              <a:schemeClr val="lt1"/>
+            </a:fontRef>
+          </p:style>
+          <p:txBody>
+            <a:bodyPr rtlCol="0" anchor="ctr"/>
+            <a:lstStyle/>
+            <a:p>
+              <a:pPr algn="ctr"/>
+              <a:endParaRPr lang="ko-KR" altLang="en-US"/>
+            </a:p>
+          </p:txBody>
+        </p:sp>
+        <p:sp>
+          <p:nvSpPr>
+            <p:cNvPr id="23" name="직사각형 22">
+              <a:extLst>
+                <a:ext uri="{FF2B5EF4-FFF2-40B4-BE49-F238E27FC236}">
+                  <a16:creationId xmlns:a16="http://schemas.microsoft.com/office/drawing/2014/main" id="{C43CC0A2-7D6B-E611-9239-7023E480C6D7}"/>
+                </a:ext>
+              </a:extLst>
+            </p:cNvPr>
+            <p:cNvSpPr/>
+            <p:nvPr/>
+          </p:nvSpPr>
+          <p:spPr>
+            <a:xfrm>
+              <a:off x="1620000" y="1620000"/>
+              <a:ext cx="1620000" cy="1620000"/>
+            </a:xfrm>
+            <a:prstGeom prst="rect">
+              <a:avLst/>
+            </a:prstGeom>
+            <a:noFill/>
+            <a:ln w="12700">
+              <a:noFill/>
+            </a:ln>
+          </p:spPr>
+          <p:style>
+            <a:lnRef idx="2">
+              <a:schemeClr val="accent1">
+                <a:shade val="15000"/>
+              </a:schemeClr>
+            </a:lnRef>
+            <a:fillRef idx="1">
+              <a:schemeClr val="accent1"/>
+            </a:fillRef>
+            <a:effectRef idx="0">
+              <a:schemeClr val="accent1"/>
+            </a:effectRef>
+            <a:fontRef idx="minor">
+              <a:schemeClr val="lt1"/>
+            </a:fontRef>
+          </p:style>
+          <p:txBody>
+            <a:bodyPr rtlCol="0" anchor="ctr"/>
+            <a:lstStyle/>
+            <a:p>
+              <a:pPr algn="ctr"/>
+              <a:endParaRPr lang="ko-KR" altLang="en-US"/>
+            </a:p>
+          </p:txBody>
+        </p:sp>
+      </p:grpSp>
       <p:pic>
         <p:nvPicPr>
           <p:cNvPr id="27" name="그림 26" descr="원, 스케치, 그래픽, 화이트이(가) 표시된 사진&#10;&#10;AI 생성 콘텐츠는 정확하지 않을 수 있습니다.">
@@ -3003,206 +3016,185 @@
               </a:ext>
             </a:extLst>
           </a:blip>
-          <a:srcRect b="16291"/>
+          <a:srcRect t="13914" b="16291"/>
           <a:stretch>
             <a:fillRect/>
           </a:stretch>
         </p:blipFill>
         <p:spPr>
           <a:xfrm>
-            <a:off x="263640" y="594722"/>
-            <a:ext cx="1092720" cy="914698"/>
+            <a:off x="263640" y="428670"/>
+            <a:ext cx="1092720" cy="762660"/>
           </a:xfrm>
           <a:prstGeom prst="rect">
             <a:avLst/>
           </a:prstGeom>
         </p:spPr>
       </p:pic>
-      <p:grpSp>
-        <p:nvGrpSpPr>
-          <p:cNvPr id="129" name="그룹 128">
+      <p:pic>
+        <p:nvPicPr>
+          <p:cNvPr id="128" name="그림 127" descr="봄, 코일 스프링, 자연, 메탈웨어이(가) 표시된 사진&#10;&#10;AI 생성 콘텐츠는 정확하지 않을 수 있습니다.">
             <a:extLst>
               <a:ext uri="{FF2B5EF4-FFF2-40B4-BE49-F238E27FC236}">
-                <a16:creationId xmlns:a16="http://schemas.microsoft.com/office/drawing/2014/main" id="{4CDB3A53-73F4-474F-385E-66D97F1C26F0}"/>
+                <a16:creationId xmlns:a16="http://schemas.microsoft.com/office/drawing/2014/main" id="{3291F18F-1F36-8714-2238-87B9FCA6CC46}"/>
               </a:ext>
             </a:extLst>
           </p:cNvPr>
-          <p:cNvGrpSpPr/>
+          <p:cNvPicPr>
+            <a:picLocks noChangeAspect="1"/>
+          </p:cNvPicPr>
           <p:nvPr/>
-        </p:nvGrpSpPr>
-        <p:grpSpPr>
+        </p:nvPicPr>
+        <p:blipFill>
+          <a:blip r:embed="rId3">
+            <a:extLst>
+              <a:ext uri="{28A0092B-C50C-407E-A947-70E740481C1C}">
+                <a14:useLocalDpi xmlns:a14="http://schemas.microsoft.com/office/drawing/2010/main" val="0"/>
+              </a:ext>
+            </a:extLst>
+          </a:blip>
+          <a:srcRect/>
+          <a:stretch>
+            <a:fillRect/>
+          </a:stretch>
+        </p:blipFill>
+        <p:spPr>
           <a:xfrm>
             <a:off x="1710000" y="90000"/>
             <a:ext cx="1440000" cy="1440000"/>
-            <a:chOff x="4285980" y="907620"/>
-            <a:chExt cx="1440000" cy="1440000"/>
           </a:xfrm>
-        </p:grpSpPr>
-        <p:pic>
-          <p:nvPicPr>
-            <p:cNvPr id="128" name="그림 127" descr="봄, 코일 스프링, 자연, 메탈웨어이(가) 표시된 사진&#10;&#10;AI 생성 콘텐츠는 정확하지 않을 수 있습니다.">
-              <a:extLst>
-                <a:ext uri="{FF2B5EF4-FFF2-40B4-BE49-F238E27FC236}">
-                  <a16:creationId xmlns:a16="http://schemas.microsoft.com/office/drawing/2014/main" id="{3291F18F-1F36-8714-2238-87B9FCA6CC46}"/>
-                </a:ext>
-              </a:extLst>
-            </p:cNvPr>
-            <p:cNvPicPr>
-              <a:picLocks noChangeAspect="1"/>
-            </p:cNvPicPr>
-            <p:nvPr/>
-          </p:nvPicPr>
-          <p:blipFill>
-            <a:blip r:embed="rId3">
-              <a:extLst>
-                <a:ext uri="{28A0092B-C50C-407E-A947-70E740481C1C}">
-                  <a14:useLocalDpi xmlns:a14="http://schemas.microsoft.com/office/drawing/2010/main" val="0"/>
-                </a:ext>
-              </a:extLst>
-            </a:blip>
-            <a:srcRect/>
-            <a:stretch>
-              <a:fillRect/>
-            </a:stretch>
-          </p:blipFill>
-          <p:spPr>
-            <a:xfrm>
-              <a:off x="4285980" y="907620"/>
-              <a:ext cx="1440000" cy="1440000"/>
-            </a:xfrm>
-            <a:custGeom>
-              <a:avLst/>
-              <a:gdLst>
-                <a:gd name="csX0" fmla="*/ 0 w 1440000"/>
-                <a:gd name="csY0" fmla="*/ 0 h 1440000"/>
-                <a:gd name="csX1" fmla="*/ 1440000 w 1440000"/>
-                <a:gd name="csY1" fmla="*/ 0 h 1440000"/>
-                <a:gd name="csX2" fmla="*/ 1440000 w 1440000"/>
-                <a:gd name="csY2" fmla="*/ 1440000 h 1440000"/>
-                <a:gd name="csX3" fmla="*/ 885660 w 1440000"/>
-                <a:gd name="csY3" fmla="*/ 1440000 h 1440000"/>
-                <a:gd name="csX4" fmla="*/ 1245660 w 1440000"/>
-                <a:gd name="csY4" fmla="*/ 1080000 h 1440000"/>
-                <a:gd name="csX5" fmla="*/ 885660 w 1440000"/>
-                <a:gd name="csY5" fmla="*/ 720000 h 1440000"/>
-                <a:gd name="csX6" fmla="*/ 525660 w 1440000"/>
-                <a:gd name="csY6" fmla="*/ 1080000 h 1440000"/>
-                <a:gd name="csX7" fmla="*/ 885660 w 1440000"/>
-                <a:gd name="csY7" fmla="*/ 1440000 h 1440000"/>
-                <a:gd name="csX8" fmla="*/ 0 w 1440000"/>
-                <a:gd name="csY8" fmla="*/ 1440000 h 1440000"/>
-              </a:gdLst>
-              <a:ahLst/>
-              <a:cxnLst>
-                <a:cxn ang="0">
-                  <a:pos x="csX0" y="csY0"/>
-                </a:cxn>
-                <a:cxn ang="0">
-                  <a:pos x="csX1" y="csY1"/>
-                </a:cxn>
-                <a:cxn ang="0">
-                  <a:pos x="csX2" y="csY2"/>
-                </a:cxn>
-                <a:cxn ang="0">
-                  <a:pos x="csX3" y="csY3"/>
-                </a:cxn>
-                <a:cxn ang="0">
-                  <a:pos x="csX4" y="csY4"/>
-                </a:cxn>
-                <a:cxn ang="0">
-                  <a:pos x="csX5" y="csY5"/>
-                </a:cxn>
-                <a:cxn ang="0">
-                  <a:pos x="csX6" y="csY6"/>
-                </a:cxn>
-                <a:cxn ang="0">
-                  <a:pos x="csX7" y="csY7"/>
-                </a:cxn>
-                <a:cxn ang="0">
-                  <a:pos x="csX8" y="csY8"/>
-                </a:cxn>
-              </a:cxnLst>
-              <a:rect l="l" t="t" r="r" b="b"/>
-              <a:pathLst>
-                <a:path w="1440000" h="1440000">
-                  <a:moveTo>
-                    <a:pt x="0" y="0"/>
-                  </a:moveTo>
-                  <a:lnTo>
-                    <a:pt x="1440000" y="0"/>
-                  </a:lnTo>
-                  <a:lnTo>
-                    <a:pt x="1440000" y="1440000"/>
-                  </a:lnTo>
-                  <a:lnTo>
-                    <a:pt x="885660" y="1440000"/>
-                  </a:lnTo>
-                  <a:cubicBezTo>
-                    <a:pt x="1084483" y="1440000"/>
-                    <a:pt x="1245660" y="1278823"/>
-                    <a:pt x="1245660" y="1080000"/>
-                  </a:cubicBezTo>
-                  <a:cubicBezTo>
-                    <a:pt x="1245660" y="881177"/>
-                    <a:pt x="1084483" y="720000"/>
-                    <a:pt x="885660" y="720000"/>
-                  </a:cubicBezTo>
-                  <a:cubicBezTo>
-                    <a:pt x="686837" y="720000"/>
-                    <a:pt x="525660" y="881177"/>
-                    <a:pt x="525660" y="1080000"/>
-                  </a:cubicBezTo>
-                  <a:cubicBezTo>
-                    <a:pt x="525660" y="1278823"/>
-                    <a:pt x="686837" y="1440000"/>
-                    <a:pt x="885660" y="1440000"/>
-                  </a:cubicBezTo>
-                  <a:lnTo>
-                    <a:pt x="0" y="1440000"/>
-                  </a:lnTo>
-                  <a:close/>
-                </a:path>
-              </a:pathLst>
-            </a:custGeom>
-          </p:spPr>
-        </p:pic>
-        <p:pic>
-          <p:nvPicPr>
-            <p:cNvPr id="55" name="그림 54" descr="원, 그래픽, 상징, 화이트이(가) 표시된 사진&#10;&#10;AI 생성 콘텐츠는 정확하지 않을 수 있습니다.">
-              <a:extLst>
-                <a:ext uri="{FF2B5EF4-FFF2-40B4-BE49-F238E27FC236}">
-                  <a16:creationId xmlns:a16="http://schemas.microsoft.com/office/drawing/2014/main" id="{D463B0AA-0449-18CF-E872-1FC8CDE36222}"/>
-                </a:ext>
-              </a:extLst>
-            </p:cNvPr>
-            <p:cNvPicPr>
-              <a:picLocks noChangeAspect="1"/>
-            </p:cNvPicPr>
-            <p:nvPr/>
-          </p:nvPicPr>
-          <p:blipFill>
-            <a:blip r:embed="rId4">
-              <a:extLst>
-                <a:ext uri="{28A0092B-C50C-407E-A947-70E740481C1C}">
-                  <a14:useLocalDpi xmlns:a14="http://schemas.microsoft.com/office/drawing/2010/main" val="0"/>
-                </a:ext>
-              </a:extLst>
-            </a:blip>
-            <a:stretch>
-              <a:fillRect/>
-            </a:stretch>
-          </p:blipFill>
-          <p:spPr>
-            <a:xfrm>
-              <a:off x="4845960" y="1673340"/>
-              <a:ext cx="648000" cy="648000"/>
-            </a:xfrm>
-            <a:prstGeom prst="rect">
-              <a:avLst/>
-            </a:prstGeom>
-          </p:spPr>
-        </p:pic>
-      </p:grpSp>
+          <a:custGeom>
+            <a:avLst/>
+            <a:gdLst>
+              <a:gd name="csX0" fmla="*/ 0 w 1440000"/>
+              <a:gd name="csY0" fmla="*/ 0 h 1440000"/>
+              <a:gd name="csX1" fmla="*/ 1440000 w 1440000"/>
+              <a:gd name="csY1" fmla="*/ 0 h 1440000"/>
+              <a:gd name="csX2" fmla="*/ 1440000 w 1440000"/>
+              <a:gd name="csY2" fmla="*/ 1440000 h 1440000"/>
+              <a:gd name="csX3" fmla="*/ 885660 w 1440000"/>
+              <a:gd name="csY3" fmla="*/ 1440000 h 1440000"/>
+              <a:gd name="csX4" fmla="*/ 1245660 w 1440000"/>
+              <a:gd name="csY4" fmla="*/ 1080000 h 1440000"/>
+              <a:gd name="csX5" fmla="*/ 885660 w 1440000"/>
+              <a:gd name="csY5" fmla="*/ 720000 h 1440000"/>
+              <a:gd name="csX6" fmla="*/ 525660 w 1440000"/>
+              <a:gd name="csY6" fmla="*/ 1080000 h 1440000"/>
+              <a:gd name="csX7" fmla="*/ 885660 w 1440000"/>
+              <a:gd name="csY7" fmla="*/ 1440000 h 1440000"/>
+              <a:gd name="csX8" fmla="*/ 0 w 1440000"/>
+              <a:gd name="csY8" fmla="*/ 1440000 h 1440000"/>
+            </a:gdLst>
+            <a:ahLst/>
+            <a:cxnLst>
+              <a:cxn ang="0">
+                <a:pos x="csX0" y="csY0"/>
+              </a:cxn>
+              <a:cxn ang="0">
+                <a:pos x="csX1" y="csY1"/>
+              </a:cxn>
+              <a:cxn ang="0">
+                <a:pos x="csX2" y="csY2"/>
+              </a:cxn>
+              <a:cxn ang="0">
+                <a:pos x="csX3" y="csY3"/>
+              </a:cxn>
+              <a:cxn ang="0">
+                <a:pos x="csX4" y="csY4"/>
+              </a:cxn>
+              <a:cxn ang="0">
+                <a:pos x="csX5" y="csY5"/>
+              </a:cxn>
+              <a:cxn ang="0">
+                <a:pos x="csX6" y="csY6"/>
+              </a:cxn>
+              <a:cxn ang="0">
+                <a:pos x="csX7" y="csY7"/>
+              </a:cxn>
+              <a:cxn ang="0">
+                <a:pos x="csX8" y="csY8"/>
+              </a:cxn>
+            </a:cxnLst>
+            <a:rect l="l" t="t" r="r" b="b"/>
+            <a:pathLst>
+              <a:path w="1440000" h="1440000">
+                <a:moveTo>
+                  <a:pt x="0" y="0"/>
+                </a:moveTo>
+                <a:lnTo>
+                  <a:pt x="1440000" y="0"/>
+                </a:lnTo>
+                <a:lnTo>
+                  <a:pt x="1440000" y="1440000"/>
+                </a:lnTo>
+                <a:lnTo>
+                  <a:pt x="885660" y="1440000"/>
+                </a:lnTo>
+                <a:cubicBezTo>
+                  <a:pt x="1084483" y="1440000"/>
+                  <a:pt x="1245660" y="1278823"/>
+                  <a:pt x="1245660" y="1080000"/>
+                </a:cubicBezTo>
+                <a:cubicBezTo>
+                  <a:pt x="1245660" y="881177"/>
+                  <a:pt x="1084483" y="720000"/>
+                  <a:pt x="885660" y="720000"/>
+                </a:cubicBezTo>
+                <a:cubicBezTo>
+                  <a:pt x="686837" y="720000"/>
+                  <a:pt x="525660" y="881177"/>
+                  <a:pt x="525660" y="1080000"/>
+                </a:cubicBezTo>
+                <a:cubicBezTo>
+                  <a:pt x="525660" y="1278823"/>
+                  <a:pt x="686837" y="1440000"/>
+                  <a:pt x="885660" y="1440000"/>
+                </a:cubicBezTo>
+                <a:lnTo>
+                  <a:pt x="0" y="1440000"/>
+                </a:lnTo>
+                <a:close/>
+              </a:path>
+            </a:pathLst>
+          </a:custGeom>
+        </p:spPr>
+      </p:pic>
+      <p:pic>
+        <p:nvPicPr>
+          <p:cNvPr id="55" name="그림 54" descr="원, 그래픽, 상징, 화이트이(가) 표시된 사진&#10;&#10;AI 생성 콘텐츠는 정확하지 않을 수 있습니다.">
+            <a:extLst>
+              <a:ext uri="{FF2B5EF4-FFF2-40B4-BE49-F238E27FC236}">
+                <a16:creationId xmlns:a16="http://schemas.microsoft.com/office/drawing/2014/main" id="{D463B0AA-0449-18CF-E872-1FC8CDE36222}"/>
+              </a:ext>
+            </a:extLst>
+          </p:cNvPr>
+          <p:cNvPicPr>
+            <a:picLocks noChangeAspect="1"/>
+          </p:cNvPicPr>
+          <p:nvPr/>
+        </p:nvPicPr>
+        <p:blipFill>
+          <a:blip r:embed="rId4">
+            <a:extLst>
+              <a:ext uri="{28A0092B-C50C-407E-A947-70E740481C1C}">
+                <a14:useLocalDpi xmlns:a14="http://schemas.microsoft.com/office/drawing/2010/main" val="0"/>
+              </a:ext>
+            </a:extLst>
+          </a:blip>
+          <a:stretch>
+            <a:fillRect/>
+          </a:stretch>
+        </p:blipFill>
+        <p:spPr>
+          <a:xfrm>
+            <a:off x="2269980" y="855720"/>
+            <a:ext cx="648000" cy="648000"/>
+          </a:xfrm>
+          <a:prstGeom prst="rect">
+            <a:avLst/>
+          </a:prstGeom>
+        </p:spPr>
+      </p:pic>
       <p:pic>
         <p:nvPicPr>
           <p:cNvPr id="132" name="그림 131" descr="실루엣이(가) 표시된 사진&#10;&#10;AI 생성 콘텐츠는 정확하지 않을 수 있습니다.">
@@ -5313,58 +5305,6 @@
           </a:prstGeom>
         </p:spPr>
       </p:pic>
-      <p:sp>
-        <p:nvSpPr>
-          <p:cNvPr id="83" name="직사각형 82">
-            <a:extLst>
-              <a:ext uri="{FF2B5EF4-FFF2-40B4-BE49-F238E27FC236}">
-                <a16:creationId xmlns:a16="http://schemas.microsoft.com/office/drawing/2014/main" id="{4102F755-5E46-15A1-E5FC-5BCF7C6916F5}"/>
-              </a:ext>
-            </a:extLst>
-          </p:cNvPr>
-          <p:cNvSpPr/>
-          <p:nvPr/>
-        </p:nvSpPr>
-        <p:spPr>
-          <a:xfrm>
-            <a:off x="1620000" y="-375"/>
-            <a:ext cx="1620000" cy="1620000"/>
-          </a:xfrm>
-          <a:prstGeom prst="rect">
-            <a:avLst/>
-          </a:prstGeom>
-          <a:noFill/>
-          <a:ln w="12700">
-            <a:solidFill>
-              <a:schemeClr val="bg1"/>
-            </a:solidFill>
-          </a:ln>
-        </p:spPr>
-        <p:style>
-          <a:lnRef idx="2">
-            <a:schemeClr val="accent1">
-              <a:shade val="15000"/>
-            </a:schemeClr>
-          </a:lnRef>
-          <a:fillRef idx="1">
-            <a:schemeClr val="accent1"/>
-          </a:fillRef>
-          <a:effectRef idx="0">
-            <a:schemeClr val="accent1"/>
-          </a:effectRef>
-          <a:fontRef idx="minor">
-            <a:schemeClr val="lt1"/>
-          </a:fontRef>
-        </p:style>
-        <p:txBody>
-          <a:bodyPr rtlCol="0" anchor="ctr"/>
-          <a:lstStyle/>
-          <a:p>
-            <a:pPr algn="ctr"/>
-            <a:endParaRPr lang="ko-KR" altLang="en-US"/>
-          </a:p>
-        </p:txBody>
-      </p:sp>
       <p:pic>
         <p:nvPicPr>
           <p:cNvPr id="91" name="그림 90" descr="원, 토성이(가) 표시된 사진&#10;&#10;AI 생성 콘텐츠는 정확하지 않을 수 있습니다.">
@@ -5473,58 +5413,6 @@
           </a:custGeom>
         </p:spPr>
       </p:pic>
-      <p:sp>
-        <p:nvSpPr>
-          <p:cNvPr id="78" name="직사각형 77">
-            <a:extLst>
-              <a:ext uri="{FF2B5EF4-FFF2-40B4-BE49-F238E27FC236}">
-                <a16:creationId xmlns:a16="http://schemas.microsoft.com/office/drawing/2014/main" id="{095759C8-AB98-8208-29AC-4E843CCEA6A6}"/>
-              </a:ext>
-            </a:extLst>
-          </p:cNvPr>
-          <p:cNvSpPr/>
-          <p:nvPr/>
-        </p:nvSpPr>
-        <p:spPr>
-          <a:xfrm>
-            <a:off x="3240000" y="0"/>
-            <a:ext cx="1620000" cy="1620000"/>
-          </a:xfrm>
-          <a:prstGeom prst="rect">
-            <a:avLst/>
-          </a:prstGeom>
-          <a:noFill/>
-          <a:ln w="12700">
-            <a:solidFill>
-              <a:schemeClr val="bg1"/>
-            </a:solidFill>
-          </a:ln>
-        </p:spPr>
-        <p:style>
-          <a:lnRef idx="2">
-            <a:schemeClr val="accent1">
-              <a:shade val="15000"/>
-            </a:schemeClr>
-          </a:lnRef>
-          <a:fillRef idx="1">
-            <a:schemeClr val="accent1"/>
-          </a:fillRef>
-          <a:effectRef idx="0">
-            <a:schemeClr val="accent1"/>
-          </a:effectRef>
-          <a:fontRef idx="minor">
-            <a:schemeClr val="lt1"/>
-          </a:fontRef>
-        </p:style>
-        <p:txBody>
-          <a:bodyPr rtlCol="0" anchor="ctr"/>
-          <a:lstStyle/>
-          <a:p>
-            <a:pPr algn="ctr"/>
-            <a:endParaRPr lang="ko-KR" altLang="en-US"/>
-          </a:p>
-        </p:txBody>
-      </p:sp>
       <p:grpSp>
         <p:nvGrpSpPr>
           <p:cNvPr id="121" name="그룹 120">
@@ -5962,110 +5850,6 @@
           </p:txBody>
         </p:sp>
       </p:grpSp>
-      <p:sp>
-        <p:nvSpPr>
-          <p:cNvPr id="110" name="직사각형 109">
-            <a:extLst>
-              <a:ext uri="{FF2B5EF4-FFF2-40B4-BE49-F238E27FC236}">
-                <a16:creationId xmlns:a16="http://schemas.microsoft.com/office/drawing/2014/main" id="{288E30C0-C972-C76C-2BD7-3D96EC5E9D59}"/>
-              </a:ext>
-            </a:extLst>
-          </p:cNvPr>
-          <p:cNvSpPr/>
-          <p:nvPr/>
-        </p:nvSpPr>
-        <p:spPr>
-          <a:xfrm>
-            <a:off x="0" y="1620000"/>
-            <a:ext cx="1620000" cy="1620000"/>
-          </a:xfrm>
-          <a:prstGeom prst="rect">
-            <a:avLst/>
-          </a:prstGeom>
-          <a:noFill/>
-          <a:ln w="12700">
-            <a:solidFill>
-              <a:schemeClr val="bg1"/>
-            </a:solidFill>
-          </a:ln>
-        </p:spPr>
-        <p:style>
-          <a:lnRef idx="2">
-            <a:schemeClr val="accent1">
-              <a:shade val="15000"/>
-            </a:schemeClr>
-          </a:lnRef>
-          <a:fillRef idx="1">
-            <a:schemeClr val="accent1"/>
-          </a:fillRef>
-          <a:effectRef idx="0">
-            <a:schemeClr val="accent1"/>
-          </a:effectRef>
-          <a:fontRef idx="minor">
-            <a:schemeClr val="lt1"/>
-          </a:fontRef>
-        </p:style>
-        <p:txBody>
-          <a:bodyPr rtlCol="0" anchor="ctr"/>
-          <a:lstStyle/>
-          <a:p>
-            <a:pPr algn="ctr"/>
-            <a:endParaRPr lang="ko-KR" altLang="en-US"/>
-          </a:p>
-        </p:txBody>
-      </p:sp>
-      <p:sp>
-        <p:nvSpPr>
-          <p:cNvPr id="114" name="직사각형 113">
-            <a:extLst>
-              <a:ext uri="{FF2B5EF4-FFF2-40B4-BE49-F238E27FC236}">
-                <a16:creationId xmlns:a16="http://schemas.microsoft.com/office/drawing/2014/main" id="{459C0942-B591-3201-D04F-062C44D4093C}"/>
-              </a:ext>
-            </a:extLst>
-          </p:cNvPr>
-          <p:cNvSpPr/>
-          <p:nvPr/>
-        </p:nvSpPr>
-        <p:spPr>
-          <a:xfrm>
-            <a:off x="1620000" y="1616927"/>
-            <a:ext cx="1620000" cy="1620000"/>
-          </a:xfrm>
-          <a:prstGeom prst="rect">
-            <a:avLst/>
-          </a:prstGeom>
-          <a:noFill/>
-          <a:ln w="12700">
-            <a:solidFill>
-              <a:schemeClr val="bg1"/>
-            </a:solidFill>
-          </a:ln>
-        </p:spPr>
-        <p:style>
-          <a:lnRef idx="2">
-            <a:schemeClr val="accent1">
-              <a:shade val="15000"/>
-            </a:schemeClr>
-          </a:lnRef>
-          <a:fillRef idx="1">
-            <a:schemeClr val="accent1"/>
-          </a:fillRef>
-          <a:effectRef idx="0">
-            <a:schemeClr val="accent1"/>
-          </a:effectRef>
-          <a:fontRef idx="minor">
-            <a:schemeClr val="lt1"/>
-          </a:fontRef>
-        </p:style>
-        <p:txBody>
-          <a:bodyPr rtlCol="0" anchor="ctr"/>
-          <a:lstStyle/>
-          <a:p>
-            <a:pPr algn="ctr"/>
-            <a:endParaRPr lang="ko-KR" altLang="en-US"/>
-          </a:p>
-        </p:txBody>
-      </p:sp>
       <p:grpSp>
         <p:nvGrpSpPr>
           <p:cNvPr id="120" name="그룹 119">
@@ -6707,6 +6491,206 @@
       </p:pic>
       <p:sp>
         <p:nvSpPr>
+          <p:cNvPr id="83" name="직사각형 82">
+            <a:extLst>
+              <a:ext uri="{FF2B5EF4-FFF2-40B4-BE49-F238E27FC236}">
+                <a16:creationId xmlns:a16="http://schemas.microsoft.com/office/drawing/2014/main" id="{4102F755-5E46-15A1-E5FC-5BCF7C6916F5}"/>
+              </a:ext>
+            </a:extLst>
+          </p:cNvPr>
+          <p:cNvSpPr/>
+          <p:nvPr/>
+        </p:nvSpPr>
+        <p:spPr>
+          <a:xfrm>
+            <a:off x="1620000" y="-375"/>
+            <a:ext cx="1620000" cy="1620000"/>
+          </a:xfrm>
+          <a:prstGeom prst="rect">
+            <a:avLst/>
+          </a:prstGeom>
+          <a:noFill/>
+          <a:ln w="12700">
+            <a:noFill/>
+          </a:ln>
+        </p:spPr>
+        <p:style>
+          <a:lnRef idx="2">
+            <a:schemeClr val="accent1">
+              <a:shade val="15000"/>
+            </a:schemeClr>
+          </a:lnRef>
+          <a:fillRef idx="1">
+            <a:schemeClr val="accent1"/>
+          </a:fillRef>
+          <a:effectRef idx="0">
+            <a:schemeClr val="accent1"/>
+          </a:effectRef>
+          <a:fontRef idx="minor">
+            <a:schemeClr val="lt1"/>
+          </a:fontRef>
+        </p:style>
+        <p:txBody>
+          <a:bodyPr rtlCol="0" anchor="ctr"/>
+          <a:lstStyle/>
+          <a:p>
+            <a:pPr algn="ctr"/>
+            <a:endParaRPr lang="ko-KR" altLang="en-US"/>
+          </a:p>
+        </p:txBody>
+      </p:sp>
+      <p:sp>
+        <p:nvSpPr>
+          <p:cNvPr id="78" name="직사각형 77">
+            <a:extLst>
+              <a:ext uri="{FF2B5EF4-FFF2-40B4-BE49-F238E27FC236}">
+                <a16:creationId xmlns:a16="http://schemas.microsoft.com/office/drawing/2014/main" id="{095759C8-AB98-8208-29AC-4E843CCEA6A6}"/>
+              </a:ext>
+            </a:extLst>
+          </p:cNvPr>
+          <p:cNvSpPr/>
+          <p:nvPr/>
+        </p:nvSpPr>
+        <p:spPr>
+          <a:xfrm>
+            <a:off x="3240000" y="0"/>
+            <a:ext cx="1620000" cy="1620000"/>
+          </a:xfrm>
+          <a:prstGeom prst="rect">
+            <a:avLst/>
+          </a:prstGeom>
+          <a:noFill/>
+          <a:ln w="12700">
+            <a:noFill/>
+          </a:ln>
+        </p:spPr>
+        <p:style>
+          <a:lnRef idx="2">
+            <a:schemeClr val="accent1">
+              <a:shade val="15000"/>
+            </a:schemeClr>
+          </a:lnRef>
+          <a:fillRef idx="1">
+            <a:schemeClr val="accent1"/>
+          </a:fillRef>
+          <a:effectRef idx="0">
+            <a:schemeClr val="accent1"/>
+          </a:effectRef>
+          <a:fontRef idx="minor">
+            <a:schemeClr val="lt1"/>
+          </a:fontRef>
+        </p:style>
+        <p:txBody>
+          <a:bodyPr rtlCol="0" anchor="ctr"/>
+          <a:lstStyle/>
+          <a:p>
+            <a:pPr algn="ctr"/>
+            <a:endParaRPr lang="ko-KR" altLang="en-US"/>
+          </a:p>
+        </p:txBody>
+      </p:sp>
+      <p:sp>
+        <p:nvSpPr>
+          <p:cNvPr id="110" name="직사각형 109">
+            <a:extLst>
+              <a:ext uri="{FF2B5EF4-FFF2-40B4-BE49-F238E27FC236}">
+                <a16:creationId xmlns:a16="http://schemas.microsoft.com/office/drawing/2014/main" id="{288E30C0-C972-C76C-2BD7-3D96EC5E9D59}"/>
+              </a:ext>
+            </a:extLst>
+          </p:cNvPr>
+          <p:cNvSpPr/>
+          <p:nvPr/>
+        </p:nvSpPr>
+        <p:spPr>
+          <a:xfrm>
+            <a:off x="0" y="1620000"/>
+            <a:ext cx="1620000" cy="1620000"/>
+          </a:xfrm>
+          <a:prstGeom prst="rect">
+            <a:avLst/>
+          </a:prstGeom>
+          <a:noFill/>
+          <a:ln w="12700">
+            <a:noFill/>
+          </a:ln>
+        </p:spPr>
+        <p:style>
+          <a:lnRef idx="2">
+            <a:schemeClr val="accent1">
+              <a:shade val="15000"/>
+            </a:schemeClr>
+          </a:lnRef>
+          <a:fillRef idx="1">
+            <a:schemeClr val="accent1"/>
+          </a:fillRef>
+          <a:effectRef idx="0">
+            <a:schemeClr val="accent1"/>
+          </a:effectRef>
+          <a:fontRef idx="minor">
+            <a:schemeClr val="lt1"/>
+          </a:fontRef>
+        </p:style>
+        <p:txBody>
+          <a:bodyPr rtlCol="0" anchor="ctr"/>
+          <a:lstStyle/>
+          <a:p>
+            <a:pPr algn="ctr"/>
+            <a:endParaRPr lang="ko-KR" altLang="en-US"/>
+          </a:p>
+        </p:txBody>
+      </p:sp>
+      <p:sp>
+        <p:nvSpPr>
+          <p:cNvPr id="114" name="직사각형 113">
+            <a:extLst>
+              <a:ext uri="{FF2B5EF4-FFF2-40B4-BE49-F238E27FC236}">
+                <a16:creationId xmlns:a16="http://schemas.microsoft.com/office/drawing/2014/main" id="{459C0942-B591-3201-D04F-062C44D4093C}"/>
+              </a:ext>
+            </a:extLst>
+          </p:cNvPr>
+          <p:cNvSpPr/>
+          <p:nvPr/>
+        </p:nvSpPr>
+        <p:spPr>
+          <a:xfrm>
+            <a:off x="1620000" y="1616927"/>
+            <a:ext cx="1620000" cy="1620000"/>
+          </a:xfrm>
+          <a:prstGeom prst="rect">
+            <a:avLst/>
+          </a:prstGeom>
+          <a:noFill/>
+          <a:ln w="12700">
+            <a:noFill/>
+          </a:ln>
+        </p:spPr>
+        <p:style>
+          <a:lnRef idx="2">
+            <a:schemeClr val="accent1">
+              <a:shade val="15000"/>
+            </a:schemeClr>
+          </a:lnRef>
+          <a:fillRef idx="1">
+            <a:schemeClr val="accent1"/>
+          </a:fillRef>
+          <a:effectRef idx="0">
+            <a:schemeClr val="accent1"/>
+          </a:effectRef>
+          <a:fontRef idx="minor">
+            <a:schemeClr val="lt1"/>
+          </a:fontRef>
+        </p:style>
+        <p:txBody>
+          <a:bodyPr rtlCol="0" anchor="ctr"/>
+          <a:lstStyle/>
+          <a:p>
+            <a:pPr algn="ctr"/>
+            <a:endParaRPr lang="ko-KR" altLang="en-US"/>
+          </a:p>
+        </p:txBody>
+      </p:sp>
+      <p:sp>
+        <p:nvSpPr>
           <p:cNvPr id="148" name="직사각형 147">
             <a:extLst>
               <a:ext uri="{FF2B5EF4-FFF2-40B4-BE49-F238E27FC236}">
@@ -6727,9 +6711,7 @@
           </a:prstGeom>
           <a:noFill/>
           <a:ln w="12700">
-            <a:solidFill>
-              <a:schemeClr val="bg1"/>
-            </a:solidFill>
+            <a:noFill/>
           </a:ln>
         </p:spPr>
         <p:style>

--- a/Assets/ThirdParty/CleanFlatIcon/UsingGroup/icon.pptx
+++ b/Assets/ThirdParty/CleanFlatIcon/UsingGroup/icon.pptx
@@ -5,7 +5,7 @@
     <p:sldMasterId id="2147483648" r:id="rId1"/>
   </p:sldMasterIdLst>
   <p:notesMasterIdLst>
-    <p:notesMasterId r:id="rId13"/>
+    <p:notesMasterId r:id="rId14"/>
   </p:notesMasterIdLst>
   <p:sldIdLst>
     <p:sldId id="258" r:id="rId2"/>
@@ -19,6 +19,7 @@
     <p:sldId id="261" r:id="rId10"/>
     <p:sldId id="263" r:id="rId11"/>
     <p:sldId id="264" r:id="rId12"/>
+    <p:sldId id="267" r:id="rId13"/>
   </p:sldIdLst>
   <p:sldSz cx="12192000" cy="6858000"/>
   <p:notesSz cx="6858000" cy="9144000"/>
@@ -210,7 +211,7 @@
           <a:p>
             <a:fld id="{623D089E-5E78-4F5C-90DB-68957509C3A9}" type="datetimeFigureOut">
               <a:rPr lang="ko-KR" altLang="en-US" smtClean="0"/>
-              <a:t>2025-12-30</a:t>
+              <a:t>2026-01-05</a:t>
             </a:fld>
             <a:endParaRPr lang="ko-KR" altLang="en-US"/>
           </a:p>
@@ -2414,6 +2415,124 @@
     <p:extLst>
       <p:ext uri="{BB962C8B-B14F-4D97-AF65-F5344CB8AC3E}">
         <p14:creationId xmlns:p14="http://schemas.microsoft.com/office/powerpoint/2010/main" val="113782066"/>
+      </p:ext>
+    </p:extLst>
+  </p:cSld>
+  <p:clrMapOvr>
+    <a:masterClrMapping/>
+  </p:clrMapOvr>
+</p:sld>
+</file>
+
+<file path=ppt/slides/slide12.xml><?xml version="1.0" encoding="utf-8"?>
+<p:sld xmlns:a="http://schemas.openxmlformats.org/drawingml/2006/main" xmlns:r="http://schemas.openxmlformats.org/officeDocument/2006/relationships" xmlns:p="http://schemas.openxmlformats.org/presentationml/2006/main">
+  <p:cSld>
+    <p:spTree>
+      <p:nvGrpSpPr>
+        <p:cNvPr id="1" name=""/>
+        <p:cNvGrpSpPr/>
+        <p:nvPr/>
+      </p:nvGrpSpPr>
+      <p:grpSpPr>
+        <a:xfrm>
+          <a:off x="0" y="0"/>
+          <a:ext cx="0" cy="0"/>
+          <a:chOff x="0" y="0"/>
+          <a:chExt cx="0" cy="0"/>
+        </a:xfrm>
+      </p:grpSpPr>
+      <p:pic>
+        <p:nvPicPr>
+          <p:cNvPr id="3" name="그림 2" descr="스크린샷, 블랙, 직사각형이(가) 표시된 사진&#10;&#10;AI 생성 콘텐츠는 정확하지 않을 수 있습니다.">
+            <a:extLst>
+              <a:ext uri="{FF2B5EF4-FFF2-40B4-BE49-F238E27FC236}">
+                <a16:creationId xmlns:a16="http://schemas.microsoft.com/office/drawing/2014/main" id="{CAEAE54B-4A75-3BA2-4C47-FE5D7F1226CE}"/>
+              </a:ext>
+            </a:extLst>
+          </p:cNvPr>
+          <p:cNvPicPr>
+            <a:picLocks noChangeAspect="1"/>
+          </p:cNvPicPr>
+          <p:nvPr/>
+        </p:nvPicPr>
+        <p:blipFill>
+          <a:blip r:embed="rId2">
+            <a:extLst>
+              <a:ext uri="{28A0092B-C50C-407E-A947-70E740481C1C}">
+                <a14:useLocalDpi xmlns:a14="http://schemas.microsoft.com/office/drawing/2010/main" val="0"/>
+              </a:ext>
+            </a:extLst>
+          </a:blip>
+          <a:stretch>
+            <a:fillRect/>
+          </a:stretch>
+        </p:blipFill>
+        <p:spPr>
+          <a:xfrm>
+            <a:off x="3657905" y="2616301"/>
+            <a:ext cx="4876190" cy="1625397"/>
+          </a:xfrm>
+          <a:prstGeom prst="rect">
+            <a:avLst/>
+          </a:prstGeom>
+        </p:spPr>
+      </p:pic>
+      <p:sp>
+        <p:nvSpPr>
+          <p:cNvPr id="4" name="직사각형 3">
+            <a:extLst>
+              <a:ext uri="{FF2B5EF4-FFF2-40B4-BE49-F238E27FC236}">
+                <a16:creationId xmlns:a16="http://schemas.microsoft.com/office/drawing/2014/main" id="{07B694D1-0CDC-6A43-1CCA-DDD64B9195F0}"/>
+              </a:ext>
+            </a:extLst>
+          </p:cNvPr>
+          <p:cNvSpPr/>
+          <p:nvPr/>
+        </p:nvSpPr>
+        <p:spPr>
+          <a:xfrm>
+            <a:off x="3657905" y="2616301"/>
+            <a:ext cx="4876190" cy="1625396"/>
+          </a:xfrm>
+          <a:prstGeom prst="rect">
+            <a:avLst/>
+          </a:prstGeom>
+          <a:noFill/>
+          <a:ln w="76200">
+            <a:solidFill>
+              <a:schemeClr val="bg1"/>
+            </a:solidFill>
+          </a:ln>
+        </p:spPr>
+        <p:style>
+          <a:lnRef idx="2">
+            <a:schemeClr val="accent1">
+              <a:shade val="15000"/>
+            </a:schemeClr>
+          </a:lnRef>
+          <a:fillRef idx="1">
+            <a:schemeClr val="accent1"/>
+          </a:fillRef>
+          <a:effectRef idx="0">
+            <a:schemeClr val="accent1"/>
+          </a:effectRef>
+          <a:fontRef idx="minor">
+            <a:schemeClr val="lt1"/>
+          </a:fontRef>
+        </p:style>
+        <p:txBody>
+          <a:bodyPr rtlCol="0" anchor="ctr"/>
+          <a:lstStyle/>
+          <a:p>
+            <a:pPr algn="ctr"/>
+            <a:endParaRPr lang="ko-KR" altLang="en-US"/>
+          </a:p>
+        </p:txBody>
+      </p:sp>
+    </p:spTree>
+    <p:extLst>
+      <p:ext uri="{BB962C8B-B14F-4D97-AF65-F5344CB8AC3E}">
+        <p14:creationId xmlns:p14="http://schemas.microsoft.com/office/powerpoint/2010/main" val="4064143045"/>
       </p:ext>
     </p:extLst>
   </p:cSld>

--- a/Assets/ThirdParty/CleanFlatIcon/UsingGroup/icon.pptx
+++ b/Assets/ThirdParty/CleanFlatIcon/UsingGroup/icon.pptx
@@ -5,7 +5,7 @@
     <p:sldMasterId id="2147483648" r:id="rId1"/>
   </p:sldMasterIdLst>
   <p:notesMasterIdLst>
-    <p:notesMasterId r:id="rId14"/>
+    <p:notesMasterId r:id="rId15"/>
   </p:notesMasterIdLst>
   <p:sldIdLst>
     <p:sldId id="258" r:id="rId2"/>
@@ -20,6 +20,7 @@
     <p:sldId id="263" r:id="rId11"/>
     <p:sldId id="264" r:id="rId12"/>
     <p:sldId id="267" r:id="rId13"/>
+    <p:sldId id="268" r:id="rId14"/>
   </p:sldIdLst>
   <p:sldSz cx="12192000" cy="6858000"/>
   <p:notesSz cx="6858000" cy="9144000"/>
@@ -211,7 +212,7 @@
           <a:p>
             <a:fld id="{623D089E-5E78-4F5C-90DB-68957509C3A9}" type="datetimeFigureOut">
               <a:rPr lang="ko-KR" altLang="en-US" smtClean="0"/>
-              <a:t>2026-01-05</a:t>
+              <a:t>2026-01-16</a:t>
             </a:fld>
             <a:endParaRPr lang="ko-KR" altLang="en-US"/>
           </a:p>
@@ -2533,6 +2534,635 @@
     <p:extLst>
       <p:ext uri="{BB962C8B-B14F-4D97-AF65-F5344CB8AC3E}">
         <p14:creationId xmlns:p14="http://schemas.microsoft.com/office/powerpoint/2010/main" val="4064143045"/>
+      </p:ext>
+    </p:extLst>
+  </p:cSld>
+  <p:clrMapOvr>
+    <a:masterClrMapping/>
+  </p:clrMapOvr>
+</p:sld>
+</file>
+
+<file path=ppt/slides/slide13.xml><?xml version="1.0" encoding="utf-8"?>
+<p:sld xmlns:a="http://schemas.openxmlformats.org/drawingml/2006/main" xmlns:r="http://schemas.openxmlformats.org/officeDocument/2006/relationships" xmlns:p="http://schemas.openxmlformats.org/presentationml/2006/main">
+  <p:cSld>
+    <p:spTree>
+      <p:nvGrpSpPr>
+        <p:cNvPr id="1" name=""/>
+        <p:cNvGrpSpPr/>
+        <p:nvPr/>
+      </p:nvGrpSpPr>
+      <p:grpSpPr>
+        <a:xfrm>
+          <a:off x="0" y="0"/>
+          <a:ext cx="0" cy="0"/>
+          <a:chOff x="0" y="0"/>
+          <a:chExt cx="0" cy="0"/>
+        </a:xfrm>
+      </p:grpSpPr>
+      <p:sp>
+        <p:nvSpPr>
+          <p:cNvPr id="57" name="자유형: 도형 56">
+            <a:extLst>
+              <a:ext uri="{FF2B5EF4-FFF2-40B4-BE49-F238E27FC236}">
+                <a16:creationId xmlns:a16="http://schemas.microsoft.com/office/drawing/2014/main" id="{0044CB16-7B88-D59E-981C-ECB36BB3ADF4}"/>
+              </a:ext>
+            </a:extLst>
+          </p:cNvPr>
+          <p:cNvSpPr/>
+          <p:nvPr/>
+        </p:nvSpPr>
+        <p:spPr>
+          <a:xfrm>
+            <a:off x="0" y="2671650"/>
+            <a:ext cx="5400000" cy="1800000"/>
+          </a:xfrm>
+          <a:custGeom>
+            <a:avLst/>
+            <a:gdLst>
+              <a:gd name="csX0" fmla="*/ 1615930 w 5400000"/>
+              <a:gd name="csY0" fmla="*/ 1440000 h 1800000"/>
+              <a:gd name="csX1" fmla="*/ 1536396 w 5400000"/>
+              <a:gd name="csY1" fmla="*/ 1536396 h 1800000"/>
+              <a:gd name="csX2" fmla="*/ 1328994 w 5400000"/>
+              <a:gd name="csY2" fmla="*/ 1691375 h 1800000"/>
+              <a:gd name="csX3" fmla="*/ 1290330 w 5400000"/>
+              <a:gd name="csY3" fmla="*/ 1710000 h 1800000"/>
+              <a:gd name="csX4" fmla="*/ 4109670 w 5400000"/>
+              <a:gd name="csY4" fmla="*/ 1710000 h 1800000"/>
+              <a:gd name="csX5" fmla="*/ 4071007 w 5400000"/>
+              <a:gd name="csY5" fmla="*/ 1691375 h 1800000"/>
+              <a:gd name="csX6" fmla="*/ 3863604 w 5400000"/>
+              <a:gd name="csY6" fmla="*/ 1536396 h 1800000"/>
+              <a:gd name="csX7" fmla="*/ 3784070 w 5400000"/>
+              <a:gd name="csY7" fmla="*/ 1440000 h 1800000"/>
+              <a:gd name="csX8" fmla="*/ 1675170 w 5400000"/>
+              <a:gd name="csY8" fmla="*/ 450000 h 1800000"/>
+              <a:gd name="csX9" fmla="*/ 1729274 w 5400000"/>
+              <a:gd name="csY9" fmla="*/ 549680 h 1800000"/>
+              <a:gd name="csX10" fmla="*/ 1800000 w 5400000"/>
+              <a:gd name="csY10" fmla="*/ 900000 h 1800000"/>
+              <a:gd name="csX11" fmla="*/ 1729274 w 5400000"/>
+              <a:gd name="csY11" fmla="*/ 1250321 h 1800000"/>
+              <a:gd name="csX12" fmla="*/ 1675170 w 5400000"/>
+              <a:gd name="csY12" fmla="*/ 1350000 h 1800000"/>
+              <a:gd name="csX13" fmla="*/ 3724831 w 5400000"/>
+              <a:gd name="csY13" fmla="*/ 1350000 h 1800000"/>
+              <a:gd name="csX14" fmla="*/ 3670727 w 5400000"/>
+              <a:gd name="csY14" fmla="*/ 1250321 h 1800000"/>
+              <a:gd name="csX15" fmla="*/ 3600000 w 5400000"/>
+              <a:gd name="csY15" fmla="*/ 900000 h 1800000"/>
+              <a:gd name="csX16" fmla="*/ 3670727 w 5400000"/>
+              <a:gd name="csY16" fmla="*/ 549680 h 1800000"/>
+              <a:gd name="csX17" fmla="*/ 3724831 w 5400000"/>
+              <a:gd name="csY17" fmla="*/ 450000 h 1800000"/>
+              <a:gd name="csX18" fmla="*/ 4500000 w 5400000"/>
+              <a:gd name="csY18" fmla="*/ 180000 h 1800000"/>
+              <a:gd name="csX19" fmla="*/ 3780000 w 5400000"/>
+              <a:gd name="csY19" fmla="*/ 900000 h 1800000"/>
+              <a:gd name="csX20" fmla="*/ 4500000 w 5400000"/>
+              <a:gd name="csY20" fmla="*/ 1620000 h 1800000"/>
+              <a:gd name="csX21" fmla="*/ 5220000 w 5400000"/>
+              <a:gd name="csY21" fmla="*/ 900000 h 1800000"/>
+              <a:gd name="csX22" fmla="*/ 4500000 w 5400000"/>
+              <a:gd name="csY22" fmla="*/ 180000 h 1800000"/>
+              <a:gd name="csX23" fmla="*/ 900000 w 5400000"/>
+              <a:gd name="csY23" fmla="*/ 180000 h 1800000"/>
+              <a:gd name="csX24" fmla="*/ 180000 w 5400000"/>
+              <a:gd name="csY24" fmla="*/ 900000 h 1800000"/>
+              <a:gd name="csX25" fmla="*/ 900000 w 5400000"/>
+              <a:gd name="csY25" fmla="*/ 1620000 h 1800000"/>
+              <a:gd name="csX26" fmla="*/ 1620000 w 5400000"/>
+              <a:gd name="csY26" fmla="*/ 900000 h 1800000"/>
+              <a:gd name="csX27" fmla="*/ 900000 w 5400000"/>
+              <a:gd name="csY27" fmla="*/ 180000 h 1800000"/>
+              <a:gd name="csX28" fmla="*/ 1290330 w 5400000"/>
+              <a:gd name="csY28" fmla="*/ 90000 h 1800000"/>
+              <a:gd name="csX29" fmla="*/ 1328994 w 5400000"/>
+              <a:gd name="csY29" fmla="*/ 108625 h 1800000"/>
+              <a:gd name="csX30" fmla="*/ 1536396 w 5400000"/>
+              <a:gd name="csY30" fmla="*/ 263604 h 1800000"/>
+              <a:gd name="csX31" fmla="*/ 1615930 w 5400000"/>
+              <a:gd name="csY31" fmla="*/ 360000 h 1800000"/>
+              <a:gd name="csX32" fmla="*/ 3784070 w 5400000"/>
+              <a:gd name="csY32" fmla="*/ 360000 h 1800000"/>
+              <a:gd name="csX33" fmla="*/ 3863604 w 5400000"/>
+              <a:gd name="csY33" fmla="*/ 263604 h 1800000"/>
+              <a:gd name="csX34" fmla="*/ 4071007 w 5400000"/>
+              <a:gd name="csY34" fmla="*/ 108625 h 1800000"/>
+              <a:gd name="csX35" fmla="*/ 4109670 w 5400000"/>
+              <a:gd name="csY35" fmla="*/ 90000 h 1800000"/>
+              <a:gd name="csX36" fmla="*/ 900000 w 5400000"/>
+              <a:gd name="csY36" fmla="*/ 0 h 1800000"/>
+              <a:gd name="csX37" fmla="*/ 4500000 w 5400000"/>
+              <a:gd name="csY37" fmla="*/ 0 h 1800000"/>
+              <a:gd name="csX38" fmla="*/ 5400000 w 5400000"/>
+              <a:gd name="csY38" fmla="*/ 900000 h 1800000"/>
+              <a:gd name="csX39" fmla="*/ 4500000 w 5400000"/>
+              <a:gd name="csY39" fmla="*/ 1800000 h 1800000"/>
+              <a:gd name="csX40" fmla="*/ 900000 w 5400000"/>
+              <a:gd name="csY40" fmla="*/ 1800000 h 1800000"/>
+              <a:gd name="csX41" fmla="*/ 807981 w 5400000"/>
+              <a:gd name="csY41" fmla="*/ 1795354 h 1800000"/>
+              <a:gd name="csX42" fmla="*/ 0 w 5400000"/>
+              <a:gd name="csY42" fmla="*/ 900000 h 1800000"/>
+              <a:gd name="csX43" fmla="*/ 900000 w 5400000"/>
+              <a:gd name="csY43" fmla="*/ 0 h 1800000"/>
+            </a:gdLst>
+            <a:ahLst/>
+            <a:cxnLst>
+              <a:cxn ang="0">
+                <a:pos x="csX0" y="csY0"/>
+              </a:cxn>
+              <a:cxn ang="0">
+                <a:pos x="csX1" y="csY1"/>
+              </a:cxn>
+              <a:cxn ang="0">
+                <a:pos x="csX2" y="csY2"/>
+              </a:cxn>
+              <a:cxn ang="0">
+                <a:pos x="csX3" y="csY3"/>
+              </a:cxn>
+              <a:cxn ang="0">
+                <a:pos x="csX4" y="csY4"/>
+              </a:cxn>
+              <a:cxn ang="0">
+                <a:pos x="csX5" y="csY5"/>
+              </a:cxn>
+              <a:cxn ang="0">
+                <a:pos x="csX6" y="csY6"/>
+              </a:cxn>
+              <a:cxn ang="0">
+                <a:pos x="csX7" y="csY7"/>
+              </a:cxn>
+              <a:cxn ang="0">
+                <a:pos x="csX8" y="csY8"/>
+              </a:cxn>
+              <a:cxn ang="0">
+                <a:pos x="csX9" y="csY9"/>
+              </a:cxn>
+              <a:cxn ang="0">
+                <a:pos x="csX10" y="csY10"/>
+              </a:cxn>
+              <a:cxn ang="0">
+                <a:pos x="csX11" y="csY11"/>
+              </a:cxn>
+              <a:cxn ang="0">
+                <a:pos x="csX12" y="csY12"/>
+              </a:cxn>
+              <a:cxn ang="0">
+                <a:pos x="csX13" y="csY13"/>
+              </a:cxn>
+              <a:cxn ang="0">
+                <a:pos x="csX14" y="csY14"/>
+              </a:cxn>
+              <a:cxn ang="0">
+                <a:pos x="csX15" y="csY15"/>
+              </a:cxn>
+              <a:cxn ang="0">
+                <a:pos x="csX16" y="csY16"/>
+              </a:cxn>
+              <a:cxn ang="0">
+                <a:pos x="csX17" y="csY17"/>
+              </a:cxn>
+              <a:cxn ang="0">
+                <a:pos x="csX18" y="csY18"/>
+              </a:cxn>
+              <a:cxn ang="0">
+                <a:pos x="csX19" y="csY19"/>
+              </a:cxn>
+              <a:cxn ang="0">
+                <a:pos x="csX20" y="csY20"/>
+              </a:cxn>
+              <a:cxn ang="0">
+                <a:pos x="csX21" y="csY21"/>
+              </a:cxn>
+              <a:cxn ang="0">
+                <a:pos x="csX22" y="csY22"/>
+              </a:cxn>
+              <a:cxn ang="0">
+                <a:pos x="csX23" y="csY23"/>
+              </a:cxn>
+              <a:cxn ang="0">
+                <a:pos x="csX24" y="csY24"/>
+              </a:cxn>
+              <a:cxn ang="0">
+                <a:pos x="csX25" y="csY25"/>
+              </a:cxn>
+              <a:cxn ang="0">
+                <a:pos x="csX26" y="csY26"/>
+              </a:cxn>
+              <a:cxn ang="0">
+                <a:pos x="csX27" y="csY27"/>
+              </a:cxn>
+              <a:cxn ang="0">
+                <a:pos x="csX28" y="csY28"/>
+              </a:cxn>
+              <a:cxn ang="0">
+                <a:pos x="csX29" y="csY29"/>
+              </a:cxn>
+              <a:cxn ang="0">
+                <a:pos x="csX30" y="csY30"/>
+              </a:cxn>
+              <a:cxn ang="0">
+                <a:pos x="csX31" y="csY31"/>
+              </a:cxn>
+              <a:cxn ang="0">
+                <a:pos x="csX32" y="csY32"/>
+              </a:cxn>
+              <a:cxn ang="0">
+                <a:pos x="csX33" y="csY33"/>
+              </a:cxn>
+              <a:cxn ang="0">
+                <a:pos x="csX34" y="csY34"/>
+              </a:cxn>
+              <a:cxn ang="0">
+                <a:pos x="csX35" y="csY35"/>
+              </a:cxn>
+              <a:cxn ang="0">
+                <a:pos x="csX36" y="csY36"/>
+              </a:cxn>
+              <a:cxn ang="0">
+                <a:pos x="csX37" y="csY37"/>
+              </a:cxn>
+              <a:cxn ang="0">
+                <a:pos x="csX38" y="csY38"/>
+              </a:cxn>
+              <a:cxn ang="0">
+                <a:pos x="csX39" y="csY39"/>
+              </a:cxn>
+              <a:cxn ang="0">
+                <a:pos x="csX40" y="csY40"/>
+              </a:cxn>
+              <a:cxn ang="0">
+                <a:pos x="csX41" y="csY41"/>
+              </a:cxn>
+              <a:cxn ang="0">
+                <a:pos x="csX42" y="csY42"/>
+              </a:cxn>
+              <a:cxn ang="0">
+                <a:pos x="csX43" y="csY43"/>
+              </a:cxn>
+            </a:cxnLst>
+            <a:rect l="l" t="t" r="r" b="b"/>
+            <a:pathLst>
+              <a:path w="5400000" h="1800000">
+                <a:moveTo>
+                  <a:pt x="1615930" y="1440000"/>
+                </a:moveTo>
+                <a:lnTo>
+                  <a:pt x="1536396" y="1536396"/>
+                </a:lnTo>
+                <a:cubicBezTo>
+                  <a:pt x="1475321" y="1597472"/>
+                  <a:pt x="1405508" y="1649810"/>
+                  <a:pt x="1328994" y="1691375"/>
+                </a:cubicBezTo>
+                <a:lnTo>
+                  <a:pt x="1290330" y="1710000"/>
+                </a:lnTo>
+                <a:lnTo>
+                  <a:pt x="4109670" y="1710000"/>
+                </a:lnTo>
+                <a:lnTo>
+                  <a:pt x="4071007" y="1691375"/>
+                </a:lnTo>
+                <a:cubicBezTo>
+                  <a:pt x="3994492" y="1649810"/>
+                  <a:pt x="3924680" y="1597472"/>
+                  <a:pt x="3863604" y="1536396"/>
+                </a:cubicBezTo>
+                <a:lnTo>
+                  <a:pt x="3784070" y="1440000"/>
+                </a:lnTo>
+                <a:close/>
+                <a:moveTo>
+                  <a:pt x="1675170" y="450000"/>
+                </a:moveTo>
+                <a:lnTo>
+                  <a:pt x="1729274" y="549680"/>
+                </a:lnTo>
+                <a:cubicBezTo>
+                  <a:pt x="1774816" y="657354"/>
+                  <a:pt x="1800000" y="775736"/>
+                  <a:pt x="1800000" y="900000"/>
+                </a:cubicBezTo>
+                <a:cubicBezTo>
+                  <a:pt x="1800000" y="1024264"/>
+                  <a:pt x="1774816" y="1142646"/>
+                  <a:pt x="1729274" y="1250321"/>
+                </a:cubicBezTo>
+                <a:lnTo>
+                  <a:pt x="1675170" y="1350000"/>
+                </a:lnTo>
+                <a:lnTo>
+                  <a:pt x="3724831" y="1350000"/>
+                </a:lnTo>
+                <a:lnTo>
+                  <a:pt x="3670727" y="1250321"/>
+                </a:lnTo>
+                <a:cubicBezTo>
+                  <a:pt x="3625184" y="1142646"/>
+                  <a:pt x="3600000" y="1024264"/>
+                  <a:pt x="3600000" y="900000"/>
+                </a:cubicBezTo>
+                <a:cubicBezTo>
+                  <a:pt x="3600000" y="775736"/>
+                  <a:pt x="3625184" y="657354"/>
+                  <a:pt x="3670727" y="549680"/>
+                </a:cubicBezTo>
+                <a:lnTo>
+                  <a:pt x="3724831" y="450000"/>
+                </a:lnTo>
+                <a:close/>
+                <a:moveTo>
+                  <a:pt x="4500000" y="180000"/>
+                </a:moveTo>
+                <a:cubicBezTo>
+                  <a:pt x="4102355" y="180000"/>
+                  <a:pt x="3780000" y="502355"/>
+                  <a:pt x="3780000" y="900000"/>
+                </a:cubicBezTo>
+                <a:cubicBezTo>
+                  <a:pt x="3780000" y="1297645"/>
+                  <a:pt x="4102355" y="1620000"/>
+                  <a:pt x="4500000" y="1620000"/>
+                </a:cubicBezTo>
+                <a:cubicBezTo>
+                  <a:pt x="4897645" y="1620000"/>
+                  <a:pt x="5220000" y="1297645"/>
+                  <a:pt x="5220000" y="900000"/>
+                </a:cubicBezTo>
+                <a:cubicBezTo>
+                  <a:pt x="5220000" y="502355"/>
+                  <a:pt x="4897645" y="180000"/>
+                  <a:pt x="4500000" y="180000"/>
+                </a:cubicBezTo>
+                <a:close/>
+                <a:moveTo>
+                  <a:pt x="900000" y="180000"/>
+                </a:moveTo>
+                <a:cubicBezTo>
+                  <a:pt x="502355" y="180000"/>
+                  <a:pt x="180000" y="502355"/>
+                  <a:pt x="180000" y="900000"/>
+                </a:cubicBezTo>
+                <a:cubicBezTo>
+                  <a:pt x="180000" y="1297645"/>
+                  <a:pt x="502355" y="1620000"/>
+                  <a:pt x="900000" y="1620000"/>
+                </a:cubicBezTo>
+                <a:cubicBezTo>
+                  <a:pt x="1297645" y="1620000"/>
+                  <a:pt x="1620000" y="1297645"/>
+                  <a:pt x="1620000" y="900000"/>
+                </a:cubicBezTo>
+                <a:cubicBezTo>
+                  <a:pt x="1620000" y="502355"/>
+                  <a:pt x="1297645" y="180000"/>
+                  <a:pt x="900000" y="180000"/>
+                </a:cubicBezTo>
+                <a:close/>
+                <a:moveTo>
+                  <a:pt x="1290330" y="90000"/>
+                </a:moveTo>
+                <a:lnTo>
+                  <a:pt x="1328994" y="108625"/>
+                </a:lnTo>
+                <a:cubicBezTo>
+                  <a:pt x="1405508" y="150190"/>
+                  <a:pt x="1475321" y="202529"/>
+                  <a:pt x="1536396" y="263604"/>
+                </a:cubicBezTo>
+                <a:lnTo>
+                  <a:pt x="1615930" y="360000"/>
+                </a:lnTo>
+                <a:lnTo>
+                  <a:pt x="3784070" y="360000"/>
+                </a:lnTo>
+                <a:lnTo>
+                  <a:pt x="3863604" y="263604"/>
+                </a:lnTo>
+                <a:cubicBezTo>
+                  <a:pt x="3924680" y="202529"/>
+                  <a:pt x="3994492" y="150190"/>
+                  <a:pt x="4071007" y="108625"/>
+                </a:cubicBezTo>
+                <a:lnTo>
+                  <a:pt x="4109670" y="90000"/>
+                </a:lnTo>
+                <a:close/>
+                <a:moveTo>
+                  <a:pt x="900000" y="0"/>
+                </a:moveTo>
+                <a:lnTo>
+                  <a:pt x="4500000" y="0"/>
+                </a:lnTo>
+                <a:cubicBezTo>
+                  <a:pt x="4997056" y="0"/>
+                  <a:pt x="5400000" y="402944"/>
+                  <a:pt x="5400000" y="900000"/>
+                </a:cubicBezTo>
+                <a:cubicBezTo>
+                  <a:pt x="5400000" y="1397056"/>
+                  <a:pt x="4997056" y="1800000"/>
+                  <a:pt x="4500000" y="1800000"/>
+                </a:cubicBezTo>
+                <a:lnTo>
+                  <a:pt x="900000" y="1800000"/>
+                </a:lnTo>
+                <a:lnTo>
+                  <a:pt x="807981" y="1795354"/>
+                </a:lnTo>
+                <a:cubicBezTo>
+                  <a:pt x="354150" y="1749265"/>
+                  <a:pt x="0" y="1365990"/>
+                  <a:pt x="0" y="900000"/>
+                </a:cubicBezTo>
+                <a:cubicBezTo>
+                  <a:pt x="0" y="402944"/>
+                  <a:pt x="402944" y="0"/>
+                  <a:pt x="900000" y="0"/>
+                </a:cubicBezTo>
+                <a:close/>
+              </a:path>
+            </a:pathLst>
+          </a:custGeom>
+          <a:solidFill>
+            <a:schemeClr val="bg1"/>
+          </a:solidFill>
+          <a:ln>
+            <a:noFill/>
+          </a:ln>
+        </p:spPr>
+        <p:style>
+          <a:lnRef idx="2">
+            <a:schemeClr val="accent1">
+              <a:shade val="15000"/>
+            </a:schemeClr>
+          </a:lnRef>
+          <a:fillRef idx="1">
+            <a:schemeClr val="accent1"/>
+          </a:fillRef>
+          <a:effectRef idx="0">
+            <a:schemeClr val="accent1"/>
+          </a:effectRef>
+          <a:fontRef idx="minor">
+            <a:schemeClr val="lt1"/>
+          </a:fontRef>
+        </p:style>
+        <p:txBody>
+          <a:bodyPr wrap="square" rtlCol="0" anchor="ctr">
+            <a:noAutofit/>
+          </a:bodyPr>
+          <a:lstStyle/>
+          <a:p>
+            <a:pPr algn="ctr"/>
+            <a:endParaRPr lang="ko-KR" altLang="en-US"/>
+          </a:p>
+        </p:txBody>
+      </p:sp>
+      <p:sp>
+        <p:nvSpPr>
+          <p:cNvPr id="63" name="자유형: 도형 62">
+            <a:extLst>
+              <a:ext uri="{FF2B5EF4-FFF2-40B4-BE49-F238E27FC236}">
+                <a16:creationId xmlns:a16="http://schemas.microsoft.com/office/drawing/2014/main" id="{15CCF467-E082-4AA3-EE2F-1CAD4A3340D9}"/>
+              </a:ext>
+            </a:extLst>
+          </p:cNvPr>
+          <p:cNvSpPr/>
+          <p:nvPr/>
+        </p:nvSpPr>
+        <p:spPr>
+          <a:xfrm>
+            <a:off x="0" y="0"/>
+            <a:ext cx="5400000" cy="1800000"/>
+          </a:xfrm>
+          <a:custGeom>
+            <a:avLst/>
+            <a:gdLst>
+              <a:gd name="csX0" fmla="*/ 900000 w 5400000"/>
+              <a:gd name="csY0" fmla="*/ 0 h 1800000"/>
+              <a:gd name="csX1" fmla="*/ 900001 w 5400000"/>
+              <a:gd name="csY1" fmla="*/ 0 h 1800000"/>
+              <a:gd name="csX2" fmla="*/ 4500000 w 5400000"/>
+              <a:gd name="csY2" fmla="*/ 0 h 1800000"/>
+              <a:gd name="csX3" fmla="*/ 5400000 w 5400000"/>
+              <a:gd name="csY3" fmla="*/ 900000 h 1800000"/>
+              <a:gd name="csX4" fmla="*/ 4500000 w 5400000"/>
+              <a:gd name="csY4" fmla="*/ 1800000 h 1800000"/>
+              <a:gd name="csX5" fmla="*/ 900000 w 5400000"/>
+              <a:gd name="csY5" fmla="*/ 1800000 h 1800000"/>
+              <a:gd name="csX6" fmla="*/ 0 w 5400000"/>
+              <a:gd name="csY6" fmla="*/ 900000 h 1800000"/>
+              <a:gd name="csX7" fmla="*/ 900000 w 5400000"/>
+              <a:gd name="csY7" fmla="*/ 0 h 1800000"/>
+            </a:gdLst>
+            <a:ahLst/>
+            <a:cxnLst>
+              <a:cxn ang="0">
+                <a:pos x="csX0" y="csY0"/>
+              </a:cxn>
+              <a:cxn ang="0">
+                <a:pos x="csX1" y="csY1"/>
+              </a:cxn>
+              <a:cxn ang="0">
+                <a:pos x="csX2" y="csY2"/>
+              </a:cxn>
+              <a:cxn ang="0">
+                <a:pos x="csX3" y="csY3"/>
+              </a:cxn>
+              <a:cxn ang="0">
+                <a:pos x="csX4" y="csY4"/>
+              </a:cxn>
+              <a:cxn ang="0">
+                <a:pos x="csX5" y="csY5"/>
+              </a:cxn>
+              <a:cxn ang="0">
+                <a:pos x="csX6" y="csY6"/>
+              </a:cxn>
+              <a:cxn ang="0">
+                <a:pos x="csX7" y="csY7"/>
+              </a:cxn>
+            </a:cxnLst>
+            <a:rect l="l" t="t" r="r" b="b"/>
+            <a:pathLst>
+              <a:path w="5400000" h="1800000">
+                <a:moveTo>
+                  <a:pt x="900000" y="0"/>
+                </a:moveTo>
+                <a:lnTo>
+                  <a:pt x="900001" y="0"/>
+                </a:lnTo>
+                <a:lnTo>
+                  <a:pt x="4500000" y="0"/>
+                </a:lnTo>
+                <a:cubicBezTo>
+                  <a:pt x="4997056" y="0"/>
+                  <a:pt x="5400000" y="402944"/>
+                  <a:pt x="5400000" y="900000"/>
+                </a:cubicBezTo>
+                <a:cubicBezTo>
+                  <a:pt x="5400000" y="1397056"/>
+                  <a:pt x="4997056" y="1800000"/>
+                  <a:pt x="4500000" y="1800000"/>
+                </a:cubicBezTo>
+                <a:lnTo>
+                  <a:pt x="900000" y="1800000"/>
+                </a:lnTo>
+                <a:cubicBezTo>
+                  <a:pt x="402944" y="1800000"/>
+                  <a:pt x="0" y="1397056"/>
+                  <a:pt x="0" y="900000"/>
+                </a:cubicBezTo>
+                <a:cubicBezTo>
+                  <a:pt x="0" y="402944"/>
+                  <a:pt x="402944" y="0"/>
+                  <a:pt x="900000" y="0"/>
+                </a:cubicBezTo>
+                <a:close/>
+              </a:path>
+            </a:pathLst>
+          </a:custGeom>
+          <a:solidFill>
+            <a:schemeClr val="bg1"/>
+          </a:solidFill>
+          <a:ln>
+            <a:noFill/>
+          </a:ln>
+        </p:spPr>
+        <p:style>
+          <a:lnRef idx="2">
+            <a:schemeClr val="accent1">
+              <a:shade val="15000"/>
+            </a:schemeClr>
+          </a:lnRef>
+          <a:fillRef idx="1">
+            <a:schemeClr val="accent1"/>
+          </a:fillRef>
+          <a:effectRef idx="0">
+            <a:schemeClr val="accent1"/>
+          </a:effectRef>
+          <a:fontRef idx="minor">
+            <a:schemeClr val="lt1"/>
+          </a:fontRef>
+        </p:style>
+        <p:txBody>
+          <a:bodyPr wrap="square" rtlCol="0" anchor="ctr">
+            <a:noAutofit/>
+          </a:bodyPr>
+          <a:lstStyle/>
+          <a:p>
+            <a:pPr algn="ctr"/>
+            <a:endParaRPr lang="ko-KR" altLang="en-US"/>
+          </a:p>
+        </p:txBody>
+      </p:sp>
+    </p:spTree>
+    <p:extLst>
+      <p:ext uri="{BB962C8B-B14F-4D97-AF65-F5344CB8AC3E}">
+        <p14:creationId xmlns:p14="http://schemas.microsoft.com/office/powerpoint/2010/main" val="1286942353"/>
       </p:ext>
     </p:extLst>
   </p:cSld>
